--- a/course/slides/AF-TRACKF-M07/AF-TRACKF-M07-v1.pptx
+++ b/course/slides/AF-TRACKF-M07/AF-TRACKF-M07-v1.pptx
@@ -8401,7 +8401,7 @@
         </p:blipFill>
         <p:spPr>
           <a:xfrm>
-            <a:off x="609600" y="3185160"/>
+            <a:off x="609600" y="3020060"/>
             <a:ext cx="1016000" cy="1016000"/>
           </a:xfrm>
           <a:prstGeom prst="rect">
@@ -8417,7 +8417,7 @@
         </p:nvSpPr>
         <p:spPr>
           <a:xfrm>
-            <a:off x="2070100" y="3147060"/>
+            <a:off x="2070100" y="2981960"/>
             <a:ext cx="9563100" cy="619760"/>
           </a:xfrm>
           <a:prstGeom prst="rect">
@@ -8456,8 +8456,8 @@
         </p:nvSpPr>
         <p:spPr>
           <a:xfrm>
-            <a:off x="2070100" y="3931920"/>
-            <a:ext cx="9563100" cy="355600"/>
+            <a:off x="2070100" y="3766820"/>
+            <a:ext cx="9563100" cy="685800"/>
           </a:xfrm>
           <a:prstGeom prst="rect">
             <a:avLst/>
@@ -8482,7 +8482,23 @@
                 </a:solidFill>
                 <a:latin typeface="Lexend"/>
               </a:rPr>
-              <a:t>Ava is fifteen.</a:t>
+              <a:t>The builder's screen said the new litter page was done, and Ava wanted to</a:t>
+            </a:r>
+          </a:p>
+          <a:p>
+            <a:pPr algn="l">
+              <a:lnSpc>
+                <a:spcPts val="2600"/>
+              </a:lnSpc>
+            </a:pPr>
+            <a:r>
+              <a:rPr sz="2000" b="0">
+                <a:solidFill>
+                  <a:srgbClr val="756E65"/>
+                </a:solidFill>
+                <a:latin typeface="Lexend"/>
+              </a:rPr>
+              <a:t>message Mara Quill, the breeder waiting for it, straight away.</a:t>
             </a:r>
           </a:p>
         </p:txBody>
@@ -10647,7 +10663,7 @@
         </p:blipFill>
         <p:spPr>
           <a:xfrm>
-            <a:off x="609600" y="3185160"/>
+            <a:off x="609600" y="3020060"/>
             <a:ext cx="1016000" cy="1016000"/>
           </a:xfrm>
           <a:prstGeom prst="rect">
@@ -10663,7 +10679,7 @@
         </p:nvSpPr>
         <p:spPr>
           <a:xfrm>
-            <a:off x="2070100" y="3147060"/>
+            <a:off x="2070100" y="2981960"/>
             <a:ext cx="9563100" cy="619760"/>
           </a:xfrm>
           <a:prstGeom prst="rect">
@@ -10702,8 +10718,8 @@
         </p:nvSpPr>
         <p:spPr>
           <a:xfrm>
-            <a:off x="2070100" y="3931920"/>
-            <a:ext cx="9563100" cy="355600"/>
+            <a:off x="2070100" y="3766820"/>
+            <a:ext cx="9563100" cy="685800"/>
           </a:xfrm>
           <a:prstGeom prst="rect">
             <a:avLst/>
@@ -10728,7 +10744,23 @@
                 </a:solidFill>
                 <a:latin typeface="Lexend"/>
               </a:rPr>
-              <a:t>Step five is the member tests.</a:t>
+              <a:t>After every paid turn, an existing member and a brand-new member of each</a:t>
+            </a:r>
+          </a:p>
+          <a:p>
+            <a:pPr algn="l">
+              <a:lnSpc>
+                <a:spcPts val="2600"/>
+              </a:lnSpc>
+            </a:pPr>
+            <a:r>
+              <a:rPr sz="2000" b="0">
+                <a:solidFill>
+                  <a:srgbClr val="756E65"/>
+                </a:solidFill>
+                <a:latin typeface="Lexend"/>
+              </a:rPr>
+              <a:t>brand do the app's core action from start to finish.</a:t>
             </a:r>
           </a:p>
         </p:txBody>
@@ -14018,7 +14050,7 @@
         </p:blipFill>
         <p:spPr>
           <a:xfrm>
-            <a:off x="609600" y="3185160"/>
+            <a:off x="609600" y="3020060"/>
             <a:ext cx="1016000" cy="1016000"/>
           </a:xfrm>
           <a:prstGeom prst="rect">
@@ -14034,7 +14066,7 @@
         </p:nvSpPr>
         <p:spPr>
           <a:xfrm>
-            <a:off x="2070100" y="3147060"/>
+            <a:off x="2070100" y="2981960"/>
             <a:ext cx="9563100" cy="619760"/>
           </a:xfrm>
           <a:prstGeom prst="rect">
@@ -14073,8 +14105,8 @@
         </p:nvSpPr>
         <p:spPr>
           <a:xfrm>
-            <a:off x="2070100" y="3931920"/>
-            <a:ext cx="9563100" cy="355600"/>
+            <a:off x="2070100" y="3766820"/>
+            <a:ext cx="9563100" cy="685800"/>
           </a:xfrm>
           <a:prstGeom prst="rect">
             <a:avLst/>
@@ -14099,7 +14131,23 @@
                 </a:solidFill>
                 <a:latin typeface="Lexend"/>
               </a:rPr>
-              <a:t>Rory is thirteen.</a:t>
+              <a:t>He was watching his dad plan a change to Trimtable for Juno Platt's salon,</a:t>
+            </a:r>
+          </a:p>
+          <a:p>
+            <a:pPr algn="l">
+              <a:lnSpc>
+                <a:spcPts val="2600"/>
+              </a:lnSpc>
+            </a:pPr>
+            <a:r>
+              <a:rPr sz="2000" b="0">
+                <a:solidFill>
+                  <a:srgbClr val="756E65"/>
+                </a:solidFill>
+                <a:latin typeface="Lexend"/>
+              </a:rPr>
+              <a:t>The Tidy Paw.</a:t>
             </a:r>
           </a:p>
         </p:txBody>
@@ -14464,7 +14512,7 @@
         </p:blipFill>
         <p:spPr>
           <a:xfrm>
-            <a:off x="609600" y="3185160"/>
+            <a:off x="609600" y="3020060"/>
             <a:ext cx="1016000" cy="1016000"/>
           </a:xfrm>
           <a:prstGeom prst="rect">
@@ -14480,7 +14528,7 @@
         </p:nvSpPr>
         <p:spPr>
           <a:xfrm>
-            <a:off x="2070100" y="3147060"/>
+            <a:off x="2070100" y="2981960"/>
             <a:ext cx="9563100" cy="619760"/>
           </a:xfrm>
           <a:prstGeom prst="rect">
@@ -14519,8 +14567,8 @@
         </p:nvSpPr>
         <p:spPr>
           <a:xfrm>
-            <a:off x="2070100" y="3931920"/>
-            <a:ext cx="9563100" cy="355600"/>
+            <a:off x="2070100" y="3766820"/>
+            <a:ext cx="9563100" cy="685800"/>
           </a:xfrm>
           <a:prstGeom prst="rect">
             <a:avLst/>
@@ -14545,7 +14593,23 @@
                 </a:solidFill>
                 <a:latin typeface="Lexend"/>
               </a:rPr>
-              <a:t>This is Stage 6, called Prompts.</a:t>
+              <a:t>It happens in the room called Reactor, and it is the only paid stage in the</a:t>
+            </a:r>
+          </a:p>
+          <a:p>
+            <a:pPr algn="l">
+              <a:lnSpc>
+                <a:spcPts val="2600"/>
+              </a:lnSpc>
+            </a:pPr>
+            <a:r>
+              <a:rPr sz="2000" b="0">
+                <a:solidFill>
+                  <a:srgbClr val="756E65"/>
+                </a:solidFill>
+                <a:latin typeface="Lexend"/>
+              </a:rPr>
+              <a:t>whole factory.</a:t>
             </a:r>
           </a:p>
         </p:txBody>
@@ -15356,7 +15420,7 @@
         </p:blipFill>
         <p:spPr>
           <a:xfrm>
-            <a:off x="609600" y="3185160"/>
+            <a:off x="609600" y="3020060"/>
             <a:ext cx="1016000" cy="1016000"/>
           </a:xfrm>
           <a:prstGeom prst="rect">
@@ -15372,7 +15436,7 @@
         </p:nvSpPr>
         <p:spPr>
           <a:xfrm>
-            <a:off x="2070100" y="3147060"/>
+            <a:off x="2070100" y="2981960"/>
             <a:ext cx="9563100" cy="619760"/>
           </a:xfrm>
           <a:prstGeom prst="rect">
@@ -15411,8 +15475,8 @@
         </p:nvSpPr>
         <p:spPr>
           <a:xfrm>
-            <a:off x="2070100" y="3931920"/>
-            <a:ext cx="9563100" cy="355600"/>
+            <a:off x="2070100" y="3766820"/>
+            <a:ext cx="9563100" cy="685800"/>
           </a:xfrm>
           <a:prstGeom prst="rect">
             <a:avLst/>
@@ -15437,7 +15501,23 @@
                 </a:solidFill>
                 <a:latin typeface="Lexend"/>
               </a:rPr>
-              <a:t>Every prompt is built from fixed blocks.</a:t>
+              <a:t>A context block lists exactly which files the builder may read, and nothing</a:t>
+            </a:r>
+          </a:p>
+          <a:p>
+            <a:pPr algn="l">
+              <a:lnSpc>
+                <a:spcPts val="2600"/>
+              </a:lnSpc>
+            </a:pPr>
+            <a:r>
+              <a:rPr sz="2000" b="0">
+                <a:solidFill>
+                  <a:srgbClr val="756E65"/>
+                </a:solidFill>
+                <a:latin typeface="Lexend"/>
+              </a:rPr>
+              <a:t>else.</a:t>
             </a:r>
           </a:p>
         </p:txBody>
@@ -15802,7 +15882,7 @@
         </p:blipFill>
         <p:spPr>
           <a:xfrm>
-            <a:off x="609600" y="3185160"/>
+            <a:off x="609600" y="3020060"/>
             <a:ext cx="1016000" cy="1016000"/>
           </a:xfrm>
           <a:prstGeom prst="rect">
@@ -15818,7 +15898,7 @@
         </p:nvSpPr>
         <p:spPr>
           <a:xfrm>
-            <a:off x="2070100" y="3147060"/>
+            <a:off x="2070100" y="2981960"/>
             <a:ext cx="9563100" cy="619760"/>
           </a:xfrm>
           <a:prstGeom prst="rect">
@@ -15857,8 +15937,8 @@
         </p:nvSpPr>
         <p:spPr>
           <a:xfrm>
-            <a:off x="2070100" y="3931920"/>
-            <a:ext cx="9563100" cy="355600"/>
+            <a:off x="2070100" y="3766820"/>
+            <a:ext cx="9563100" cy="685800"/>
           </a:xfrm>
           <a:prstGeom prst="rect">
             <a:avLst/>
@@ -15883,7 +15963,23 @@
                 </a:solidFill>
                 <a:latin typeface="Lexend"/>
               </a:rPr>
-              <a:t>Each prompt also carries its own test.</a:t>
+              <a:t>Where the app has brands, the test covers both walls: the brand wall, where</a:t>
+            </a:r>
+          </a:p>
+          <a:p>
+            <a:pPr algn="l">
+              <a:lnSpc>
+                <a:spcPts val="2600"/>
+              </a:lnSpc>
+            </a:pPr>
+            <a:r>
+              <a:rPr sz="2000" b="0">
+                <a:solidFill>
+                  <a:srgbClr val="756E65"/>
+                </a:solidFill>
+                <a:latin typeface="Lexend"/>
+              </a:rPr>
+              <a:t>Brand B cannot see Brand A, and the member wall, where one...</a:t>
             </a:r>
           </a:p>
         </p:txBody>
